--- a/gakkyu/tegami/pptx/E2.pptx
+++ b/gakkyu/tegami/pptx/E2.pptx
@@ -3622,6 +3622,7 @@
               <a:srgbClr val="6AA7A7"/>
             </a:solidFill>
           </a:ln>
+          <a:effectLst/>
         </p:spPr>
         <p:style>
           <a:lnRef idx="2">
@@ -3630,7 +3631,7 @@
           <a:fillRef idx="0">
             <a:schemeClr val="accent1"/>
           </a:fillRef>
-          <a:effectRef idx="1">
+          <a:effectRef idx="0">
             <a:schemeClr val="accent1"/>
           </a:effectRef>
           <a:fontRef idx="minor">
@@ -3667,7 +3668,7 @@
           <a:fillRef idx="3">
             <a:schemeClr val="accent1"/>
           </a:fillRef>
-          <a:effectRef idx="2">
+          <a:effectRef idx="0">
             <a:schemeClr val="accent1"/>
           </a:effectRef>
           <a:fontRef idx="minor">
@@ -3750,6 +3751,7 @@
                 <a:srgbClr val="6AA7A7"/>
               </a:solidFill>
             </a:ln>
+            <a:effectLst/>
           </p:spPr>
           <p:style>
             <a:lnRef idx="2">
@@ -3758,7 +3760,7 @@
             <a:fillRef idx="0">
               <a:schemeClr val="accent1"/>
             </a:fillRef>
-            <a:effectRef idx="1">
+            <a:effectRef idx="0">
               <a:schemeClr val="accent1"/>
             </a:effectRef>
             <a:fontRef idx="minor">
@@ -3785,6 +3787,7 @@
                 <a:srgbClr val="6AA7A7"/>
               </a:solidFill>
             </a:ln>
+            <a:effectLst/>
           </p:spPr>
           <p:style>
             <a:lnRef idx="2">
@@ -3793,7 +3796,7 @@
             <a:fillRef idx="0">
               <a:schemeClr val="accent1"/>
             </a:fillRef>
-            <a:effectRef idx="1">
+            <a:effectRef idx="0">
               <a:schemeClr val="accent1"/>
             </a:effectRef>
             <a:fontRef idx="minor">
@@ -3820,6 +3823,7 @@
                 <a:srgbClr val="6AA7A7"/>
               </a:solidFill>
             </a:ln>
+            <a:effectLst/>
           </p:spPr>
           <p:style>
             <a:lnRef idx="2">
@@ -3828,7 +3832,7 @@
             <a:fillRef idx="0">
               <a:schemeClr val="accent1"/>
             </a:fillRef>
-            <a:effectRef idx="1">
+            <a:effectRef idx="0">
               <a:schemeClr val="accent1"/>
             </a:effectRef>
             <a:fontRef idx="minor">
@@ -3855,6 +3859,7 @@
                 <a:srgbClr val="6AA7A7"/>
               </a:solidFill>
             </a:ln>
+            <a:effectLst/>
           </p:spPr>
           <p:style>
             <a:lnRef idx="2">
@@ -3863,7 +3868,7 @@
             <a:fillRef idx="0">
               <a:schemeClr val="accent1"/>
             </a:fillRef>
-            <a:effectRef idx="1">
+            <a:effectRef idx="0">
               <a:schemeClr val="accent1"/>
             </a:effectRef>
             <a:fontRef idx="minor">
@@ -3890,6 +3895,7 @@
                 <a:srgbClr val="6AA7A7"/>
               </a:solidFill>
             </a:ln>
+            <a:effectLst/>
           </p:spPr>
           <p:style>
             <a:lnRef idx="2">
@@ -3898,7 +3904,7 @@
             <a:fillRef idx="0">
               <a:schemeClr val="accent1"/>
             </a:fillRef>
-            <a:effectRef idx="1">
+            <a:effectRef idx="0">
               <a:schemeClr val="accent1"/>
             </a:effectRef>
             <a:fontRef idx="minor">
@@ -3925,6 +3931,7 @@
                 <a:srgbClr val="6AA7A7"/>
               </a:solidFill>
             </a:ln>
+            <a:effectLst/>
           </p:spPr>
           <p:style>
             <a:lnRef idx="2">
@@ -3933,7 +3940,7 @@
             <a:fillRef idx="0">
               <a:schemeClr val="accent1"/>
             </a:fillRef>
-            <a:effectRef idx="1">
+            <a:effectRef idx="0">
               <a:schemeClr val="accent1"/>
             </a:effectRef>
             <a:fontRef idx="minor">
@@ -3960,6 +3967,7 @@
                 <a:srgbClr val="6AA7A7"/>
               </a:solidFill>
             </a:ln>
+            <a:effectLst/>
           </p:spPr>
           <p:style>
             <a:lnRef idx="2">
@@ -3968,7 +3976,7 @@
             <a:fillRef idx="0">
               <a:schemeClr val="accent1"/>
             </a:fillRef>
-            <a:effectRef idx="1">
+            <a:effectRef idx="0">
               <a:schemeClr val="accent1"/>
             </a:effectRef>
             <a:fontRef idx="minor">
@@ -3995,6 +4003,7 @@
                 <a:srgbClr val="6AA7A7"/>
               </a:solidFill>
             </a:ln>
+            <a:effectLst/>
           </p:spPr>
           <p:style>
             <a:lnRef idx="2">
@@ -4003,7 +4012,7 @@
             <a:fillRef idx="0">
               <a:schemeClr val="accent1"/>
             </a:fillRef>
-            <a:effectRef idx="1">
+            <a:effectRef idx="0">
               <a:schemeClr val="accent1"/>
             </a:effectRef>
             <a:fontRef idx="minor">
@@ -4030,6 +4039,7 @@
                 <a:srgbClr val="6AA7A7"/>
               </a:solidFill>
             </a:ln>
+            <a:effectLst/>
           </p:spPr>
           <p:style>
             <a:lnRef idx="2">
@@ -4038,7 +4048,7 @@
             <a:fillRef idx="0">
               <a:schemeClr val="accent1"/>
             </a:fillRef>
-            <a:effectRef idx="1">
+            <a:effectRef idx="0">
               <a:schemeClr val="accent1"/>
             </a:effectRef>
             <a:fontRef idx="minor">

--- a/gakkyu/tegami/pptx/E2.pptx
+++ b/gakkyu/tegami/pptx/E2.pptx
@@ -3568,44 +3568,9 @@
           </a:p>
         </p:txBody>
       </p:sp>
-      <p:sp>
-        <p:nvSpPr>
-          <p:cNvPr id="3" name="名前欄"/>
-          <p:cNvSpPr txBox="1"/>
-          <p:nvPr/>
-        </p:nvSpPr>
-        <p:spPr>
-          <a:xfrm>
-            <a:off x="3600000" y="475200"/>
-            <a:ext cx="3420000" cy="252000"/>
-          </a:xfrm>
-          <a:prstGeom prst="rect">
-            <a:avLst/>
-          </a:prstGeom>
-          <a:noFill/>
-        </p:spPr>
-        <p:txBody>
-          <a:bodyPr wrap="square" lIns="0" rIns="0" tIns="0" bIns="0" anchor="t">
-            <a:spAutoFit/>
-          </a:bodyPr>
-          <a:lstStyle/>
-          <a:p>
-            <a:pPr algn="r"/>
-            <a:r>
-              <a:rPr sz="1000" b="0">
-                <a:solidFill>
-                  <a:srgbClr val="38424B"/>
-                </a:solidFill>
-                <a:latin typeface="UD デジタル 教科書体 N-R"/>
-              </a:rPr>
-              <a:t>（　　年　　組　　名前　　　　　　　　）</a:t>
-            </a:r>
-          </a:p>
-        </p:txBody>
-      </p:sp>
       <p:cxnSp>
         <p:nvCxnSpPr>
-          <p:cNvPr id="4" name="見出しの線"/>
+          <p:cNvPr id="3" name="見出しの線"/>
           <p:cNvCxnSpPr/>
           <p:nvPr/>
         </p:nvCxnSpPr>
@@ -3641,7 +3606,7 @@
       </p:cxnSp>
       <p:sp>
         <p:nvSpPr>
-          <p:cNvPr id="5" name="絵をかく枠"/>
+          <p:cNvPr id="4" name="絵をかく枠"/>
           <p:cNvSpPr/>
           <p:nvPr/>
         </p:nvSpPr>
@@ -3685,7 +3650,7 @@
       </p:sp>
       <p:sp>
         <p:nvSpPr>
-          <p:cNvPr id="6" name="枠のラベル"/>
+          <p:cNvPr id="5" name="枠のラベル"/>
           <p:cNvSpPr txBox="1"/>
           <p:nvPr/>
         </p:nvSpPr>
@@ -3720,7 +3685,7 @@
       </p:sp>
       <p:grpSp>
         <p:nvGrpSpPr>
-          <p:cNvPr id="7" name="けい線（よこ）"/>
+          <p:cNvPr id="6" name="けい線（よこ）"/>
           <p:cNvGrpSpPr/>
           <p:nvPr/>
         </p:nvGrpSpPr>
@@ -3734,7 +3699,7 @@
         </p:grpSpPr>
         <p:cxnSp>
           <p:nvCxnSpPr>
-            <p:cNvPr id="8" name="よこ線 1"/>
+            <p:cNvPr id="7" name="よこ線 1"/>
             <p:cNvCxnSpPr/>
             <p:nvPr/>
           </p:nvCxnSpPr>
@@ -3770,7 +3735,7 @@
         </p:cxnSp>
         <p:cxnSp>
           <p:nvCxnSpPr>
-            <p:cNvPr id="9" name="よこ線 2"/>
+            <p:cNvPr id="8" name="よこ線 2"/>
             <p:cNvCxnSpPr/>
             <p:nvPr/>
           </p:nvCxnSpPr>
@@ -3806,7 +3771,7 @@
         </p:cxnSp>
         <p:cxnSp>
           <p:nvCxnSpPr>
-            <p:cNvPr id="10" name="よこ線 3"/>
+            <p:cNvPr id="9" name="よこ線 3"/>
             <p:cNvCxnSpPr/>
             <p:nvPr/>
           </p:nvCxnSpPr>
@@ -3842,7 +3807,7 @@
         </p:cxnSp>
         <p:cxnSp>
           <p:nvCxnSpPr>
-            <p:cNvPr id="11" name="よこ線 4"/>
+            <p:cNvPr id="10" name="よこ線 4"/>
             <p:cNvCxnSpPr/>
             <p:nvPr/>
           </p:nvCxnSpPr>
@@ -3878,7 +3843,7 @@
         </p:cxnSp>
         <p:cxnSp>
           <p:nvCxnSpPr>
-            <p:cNvPr id="12" name="よこ線 5"/>
+            <p:cNvPr id="11" name="よこ線 5"/>
             <p:cNvCxnSpPr/>
             <p:nvPr/>
           </p:nvCxnSpPr>
@@ -3914,7 +3879,7 @@
         </p:cxnSp>
         <p:cxnSp>
           <p:nvCxnSpPr>
-            <p:cNvPr id="13" name="よこ線 6"/>
+            <p:cNvPr id="12" name="よこ線 6"/>
             <p:cNvCxnSpPr/>
             <p:nvPr/>
           </p:nvCxnSpPr>
@@ -3950,7 +3915,7 @@
         </p:cxnSp>
         <p:cxnSp>
           <p:nvCxnSpPr>
-            <p:cNvPr id="14" name="よこ線 7"/>
+            <p:cNvPr id="13" name="よこ線 7"/>
             <p:cNvCxnSpPr/>
             <p:nvPr/>
           </p:nvCxnSpPr>
@@ -3986,7 +3951,7 @@
         </p:cxnSp>
         <p:cxnSp>
           <p:nvCxnSpPr>
-            <p:cNvPr id="15" name="よこ線 8"/>
+            <p:cNvPr id="14" name="よこ線 8"/>
             <p:cNvCxnSpPr/>
             <p:nvPr/>
           </p:nvCxnSpPr>
@@ -4022,7 +3987,7 @@
         </p:cxnSp>
         <p:cxnSp>
           <p:nvCxnSpPr>
-            <p:cNvPr id="16" name="よこ線 9"/>
+            <p:cNvPr id="15" name="よこ線 9"/>
             <p:cNvCxnSpPr/>
             <p:nvPr/>
           </p:nvCxnSpPr>
@@ -4059,7 +4024,7 @@
       </p:grpSp>
       <p:pic>
         <p:nvPicPr>
-          <p:cNvPr id="17" name="さし絵（消してもかまいません）" descr="_tmp_ill.png"/>
+          <p:cNvPr id="16" name="さし絵（消してもかまいません）" descr="_tmp_ill.png"/>
           <p:cNvPicPr>
             <a:picLocks noChangeAspect="1"/>
           </p:cNvPicPr>
@@ -4083,7 +4048,7 @@
       </p:pic>
       <p:sp>
         <p:nvSpPr>
-          <p:cNvPr id="18" name="紙の説明（消してもかまいません）"/>
+          <p:cNvPr id="17" name="紙の説明（消してもかまいません）"/>
           <p:cNvSpPr txBox="1"/>
           <p:nvPr/>
         </p:nvSpPr>
@@ -4118,7 +4083,7 @@
       </p:sp>
       <p:sp>
         <p:nvSpPr>
-          <p:cNvPr id="19" name="クレジット"/>
+          <p:cNvPr id="18" name="クレジット"/>
           <p:cNvSpPr txBox="1"/>
           <p:nvPr/>
         </p:nvSpPr>
